--- a/report/N24_diffusion_attack_deck.pptx
+++ b/report/N24_diffusion_attack_deck.pptx
@@ -1506,74 +1506,8 @@
         </p:nvSpPr>
         <p:spPr>
           <a:xfrm>
-            <a:off x="10058400" y="640080"/>
-            <a:ext cx="1554480" cy="1554480"/>
-          </a:xfrm>
-          <a:prstGeom prst="ellipse">
-            <a:avLst/>
-          </a:prstGeom>
-          <a:solidFill>
-            <a:srgbClr val="1C7293">
-              <a:alpha val="40000"/>
-            </a:srgbClr>
-          </a:solidFill>
-          <a:ln/>
-        </p:spPr>
-      </p:sp>
-      <p:sp>
-        <p:nvSpPr>
-          <p:cNvPr id="3" name="Shape 1"/>
-          <p:cNvSpPr/>
-          <p:nvPr/>
-        </p:nvSpPr>
-        <p:spPr>
-          <a:xfrm>
-            <a:off x="10972800" y="1920240"/>
-            <a:ext cx="822960" cy="822960"/>
-          </a:xfrm>
-          <a:prstGeom prst="ellipse">
-            <a:avLst/>
-          </a:prstGeom>
-          <a:solidFill>
-            <a:srgbClr val="E63946">
-              <a:alpha val="55000"/>
-            </a:srgbClr>
-          </a:solidFill>
-          <a:ln/>
-        </p:spPr>
-      </p:sp>
-      <p:sp>
-        <p:nvSpPr>
-          <p:cNvPr id="4" name="Shape 2"/>
-          <p:cNvSpPr/>
-          <p:nvPr/>
-        </p:nvSpPr>
-        <p:spPr>
-          <a:xfrm>
-            <a:off x="9509760" y="2103120"/>
-            <a:ext cx="502920" cy="502920"/>
-          </a:xfrm>
-          <a:prstGeom prst="ellipse">
-            <a:avLst/>
-          </a:prstGeom>
-          <a:solidFill>
-            <a:srgbClr val="E9C46A">
-              <a:alpha val="60000"/>
-            </a:srgbClr>
-          </a:solidFill>
-          <a:ln/>
-        </p:spPr>
-      </p:sp>
-      <p:sp>
-        <p:nvSpPr>
-          <p:cNvPr id="5" name="Shape 3"/>
-          <p:cNvSpPr/>
-          <p:nvPr/>
-        </p:nvSpPr>
-        <p:spPr>
-          <a:xfrm>
-            <a:off x="10012680" y="2331720"/>
-            <a:ext cx="1325880" cy="-274320"/>
+            <a:off x="10835640" y="1417320"/>
+            <a:ext cx="548640" cy="914400"/>
           </a:xfrm>
           <a:prstGeom prst="line">
             <a:avLst/>
@@ -1582,7 +1516,7 @@
           <a:ln w="19050">
             <a:solidFill>
               <a:srgbClr val="1C7293">
-                <a:alpha val="60000"/>
+                <a:alpha val="45000"/>
               </a:srgbClr>
             </a:solidFill>
             <a:prstDash val="solid"/>
@@ -1591,14 +1525,14 @@
       </p:sp>
       <p:sp>
         <p:nvSpPr>
-          <p:cNvPr id="6" name="Shape 4"/>
-          <p:cNvSpPr/>
-          <p:nvPr/>
-        </p:nvSpPr>
-        <p:spPr>
-          <a:xfrm>
-            <a:off x="10835640" y="1417320"/>
-            <a:ext cx="548640" cy="914400"/>
+          <p:cNvPr id="3" name="Shape 1"/>
+          <p:cNvSpPr/>
+          <p:nvPr/>
+        </p:nvSpPr>
+        <p:spPr>
+          <a:xfrm>
+            <a:off x="10012680" y="2331720"/>
+            <a:ext cx="868680" cy="-411480"/>
           </a:xfrm>
           <a:prstGeom prst="line">
             <a:avLst/>
@@ -1607,11 +1541,77 @@
           <a:ln w="19050">
             <a:solidFill>
               <a:srgbClr val="E9C46A">
-                <a:alpha val="60000"/>
+                <a:alpha val="45000"/>
               </a:srgbClr>
             </a:solidFill>
             <a:prstDash val="solid"/>
           </a:ln>
+        </p:spPr>
+      </p:sp>
+      <p:sp>
+        <p:nvSpPr>
+          <p:cNvPr id="4" name="Shape 2"/>
+          <p:cNvSpPr/>
+          <p:nvPr/>
+        </p:nvSpPr>
+        <p:spPr>
+          <a:xfrm>
+            <a:off x="10058400" y="640080"/>
+            <a:ext cx="1554480" cy="1554480"/>
+          </a:xfrm>
+          <a:prstGeom prst="ellipse">
+            <a:avLst/>
+          </a:prstGeom>
+          <a:solidFill>
+            <a:srgbClr val="1C7293">
+              <a:alpha val="40000"/>
+            </a:srgbClr>
+          </a:solidFill>
+          <a:ln/>
+        </p:spPr>
+      </p:sp>
+      <p:sp>
+        <p:nvSpPr>
+          <p:cNvPr id="5" name="Shape 3"/>
+          <p:cNvSpPr/>
+          <p:nvPr/>
+        </p:nvSpPr>
+        <p:spPr>
+          <a:xfrm>
+            <a:off x="10972800" y="1920240"/>
+            <a:ext cx="822960" cy="822960"/>
+          </a:xfrm>
+          <a:prstGeom prst="ellipse">
+            <a:avLst/>
+          </a:prstGeom>
+          <a:solidFill>
+            <a:srgbClr val="E63946">
+              <a:alpha val="55000"/>
+            </a:srgbClr>
+          </a:solidFill>
+          <a:ln/>
+        </p:spPr>
+      </p:sp>
+      <p:sp>
+        <p:nvSpPr>
+          <p:cNvPr id="6" name="Shape 4"/>
+          <p:cNvSpPr/>
+          <p:nvPr/>
+        </p:nvSpPr>
+        <p:spPr>
+          <a:xfrm>
+            <a:off x="9509760" y="2103120"/>
+            <a:ext cx="502920" cy="502920"/>
+          </a:xfrm>
+          <a:prstGeom prst="ellipse">
+            <a:avLst/>
+          </a:prstGeom>
+          <a:solidFill>
+            <a:srgbClr val="E9C46A">
+              <a:alpha val="60000"/>
+            </a:srgbClr>
+          </a:solidFill>
+          <a:ln/>
         </p:spPr>
       </p:sp>
       <p:pic>
@@ -1789,7 +1789,7 @@
             <a:r>
               <a:rPr lang="en-US" sz="1500" dirty="0">
                 <a:solidFill>
-                  <a:srgbClr val="8D99AE"/>
+                  <a:srgbClr val="A9B4D6"/>
                 </a:solidFill>
                 <a:latin typeface="Calibri" pitchFamily="34" charset="0"/>
                 <a:ea typeface="Calibri" pitchFamily="34" charset="-122"/>
@@ -2173,8 +2173,8 @@
         </p:nvSpPr>
         <p:spPr>
           <a:xfrm>
-            <a:off x="640080" y="1783080"/>
-            <a:ext cx="5349240" cy="1965960"/>
+            <a:off x="640080" y="2286000"/>
+            <a:ext cx="5349240" cy="1280160"/>
           </a:xfrm>
           <a:prstGeom prst="rect">
             <a:avLst/>
@@ -2200,8 +2200,8 @@
         </p:nvSpPr>
         <p:spPr>
           <a:xfrm>
-            <a:off x="640080" y="1783080"/>
-            <a:ext cx="82296" cy="1965960"/>
+            <a:off x="640080" y="2286000"/>
+            <a:ext cx="82296" cy="1280160"/>
           </a:xfrm>
           <a:prstGeom prst="rect">
             <a:avLst/>
@@ -2220,7 +2220,7 @@
         </p:nvSpPr>
         <p:spPr>
           <a:xfrm>
-            <a:off x="896112" y="2039112"/>
+            <a:off x="896112" y="2642616"/>
             <a:ext cx="566928" cy="566928"/>
           </a:xfrm>
           <a:prstGeom prst="ellipse">
@@ -2248,7 +2248,7 @@
         </p:blipFill>
         <p:spPr>
           <a:xfrm>
-            <a:off x="1014984" y="2157984"/>
+            <a:off x="1014984" y="2761488"/>
             <a:ext cx="329184" cy="329184"/>
           </a:xfrm>
           <a:prstGeom prst="rect">
@@ -2264,8 +2264,8 @@
         </p:nvSpPr>
         <p:spPr>
           <a:xfrm>
-            <a:off x="1627632" y="2020824"/>
-            <a:ext cx="4206240" cy="365760"/>
+            <a:off x="1627632" y="2487168"/>
+            <a:ext cx="4160520" cy="365760"/>
           </a:xfrm>
           <a:prstGeom prst="rect">
             <a:avLst/>
@@ -2303,8 +2303,8 @@
         </p:nvSpPr>
         <p:spPr>
           <a:xfrm>
-            <a:off x="1627632" y="2386584"/>
-            <a:ext cx="4206240" cy="1234440"/>
+            <a:off x="1627632" y="2852928"/>
+            <a:ext cx="4160520" cy="530352"/>
           </a:xfrm>
           <a:prstGeom prst="rect">
             <a:avLst/>
@@ -2317,6 +2317,9 @@
           <a:lstStyle/>
           <a:p>
             <a:pPr indent="0" marL="0">
+              <a:lnSpc>
+                <a:spcPct val="102000"/>
+              </a:lnSpc>
               <a:buNone/>
             </a:pPr>
             <a:r>
@@ -2342,8 +2345,8 @@
         </p:nvSpPr>
         <p:spPr>
           <a:xfrm>
-            <a:off x="6263640" y="1783080"/>
-            <a:ext cx="5349240" cy="1965960"/>
+            <a:off x="6263640" y="2286000"/>
+            <a:ext cx="5349240" cy="1280160"/>
           </a:xfrm>
           <a:prstGeom prst="rect">
             <a:avLst/>
@@ -2369,8 +2372,8 @@
         </p:nvSpPr>
         <p:spPr>
           <a:xfrm>
-            <a:off x="6263640" y="1783080"/>
-            <a:ext cx="82296" cy="1965960"/>
+            <a:off x="6263640" y="2286000"/>
+            <a:ext cx="82296" cy="1280160"/>
           </a:xfrm>
           <a:prstGeom prst="rect">
             <a:avLst/>
@@ -2389,7 +2392,7 @@
         </p:nvSpPr>
         <p:spPr>
           <a:xfrm>
-            <a:off x="6519672" y="2039112"/>
+            <a:off x="6519672" y="2642616"/>
             <a:ext cx="566928" cy="566928"/>
           </a:xfrm>
           <a:prstGeom prst="ellipse">
@@ -2417,7 +2420,7 @@
         </p:blipFill>
         <p:spPr>
           <a:xfrm>
-            <a:off x="6638544" y="2157984"/>
+            <a:off x="6638544" y="2761488"/>
             <a:ext cx="329184" cy="329184"/>
           </a:xfrm>
           <a:prstGeom prst="rect">
@@ -2433,8 +2436,8 @@
         </p:nvSpPr>
         <p:spPr>
           <a:xfrm>
-            <a:off x="7251192" y="2020824"/>
-            <a:ext cx="4206240" cy="365760"/>
+            <a:off x="7251192" y="2487168"/>
+            <a:ext cx="4160520" cy="365760"/>
           </a:xfrm>
           <a:prstGeom prst="rect">
             <a:avLst/>
@@ -2472,8 +2475,8 @@
         </p:nvSpPr>
         <p:spPr>
           <a:xfrm>
-            <a:off x="7251192" y="2386584"/>
-            <a:ext cx="4206240" cy="1234440"/>
+            <a:off x="7251192" y="2852928"/>
+            <a:ext cx="4160520" cy="530352"/>
           </a:xfrm>
           <a:prstGeom prst="rect">
             <a:avLst/>
@@ -2486,6 +2489,9 @@
           <a:lstStyle/>
           <a:p>
             <a:pPr indent="0" marL="0">
+              <a:lnSpc>
+                <a:spcPct val="102000"/>
+              </a:lnSpc>
               <a:buNone/>
             </a:pPr>
             <a:r>
@@ -2511,8 +2517,8 @@
         </p:nvSpPr>
         <p:spPr>
           <a:xfrm>
-            <a:off x="640080" y="3977640"/>
-            <a:ext cx="5349240" cy="1965960"/>
+            <a:off x="640080" y="3886200"/>
+            <a:ext cx="5349240" cy="1280160"/>
           </a:xfrm>
           <a:prstGeom prst="rect">
             <a:avLst/>
@@ -2538,8 +2544,8 @@
         </p:nvSpPr>
         <p:spPr>
           <a:xfrm>
-            <a:off x="640080" y="3977640"/>
-            <a:ext cx="82296" cy="1965960"/>
+            <a:off x="640080" y="3886200"/>
+            <a:ext cx="82296" cy="1280160"/>
           </a:xfrm>
           <a:prstGeom prst="rect">
             <a:avLst/>
@@ -2558,7 +2564,7 @@
         </p:nvSpPr>
         <p:spPr>
           <a:xfrm>
-            <a:off x="896112" y="4233672"/>
+            <a:off x="896112" y="4242816"/>
             <a:ext cx="566928" cy="566928"/>
           </a:xfrm>
           <a:prstGeom prst="ellipse">
@@ -2586,7 +2592,7 @@
         </p:blipFill>
         <p:spPr>
           <a:xfrm>
-            <a:off x="1014984" y="4352544"/>
+            <a:off x="1014984" y="4361688"/>
             <a:ext cx="329184" cy="329184"/>
           </a:xfrm>
           <a:prstGeom prst="rect">
@@ -2602,8 +2608,8 @@
         </p:nvSpPr>
         <p:spPr>
           <a:xfrm>
-            <a:off x="1627632" y="4215384"/>
-            <a:ext cx="4206240" cy="365760"/>
+            <a:off x="1627632" y="4087368"/>
+            <a:ext cx="4160520" cy="365760"/>
           </a:xfrm>
           <a:prstGeom prst="rect">
             <a:avLst/>
@@ -2641,8 +2647,8 @@
         </p:nvSpPr>
         <p:spPr>
           <a:xfrm>
-            <a:off x="1627632" y="4581144"/>
-            <a:ext cx="4206240" cy="1234440"/>
+            <a:off x="1627632" y="4453128"/>
+            <a:ext cx="4160520" cy="530352"/>
           </a:xfrm>
           <a:prstGeom prst="rect">
             <a:avLst/>
@@ -2655,6 +2661,9 @@
           <a:lstStyle/>
           <a:p>
             <a:pPr indent="0" marL="0">
+              <a:lnSpc>
+                <a:spcPct val="102000"/>
+              </a:lnSpc>
               <a:buNone/>
             </a:pPr>
             <a:r>
@@ -2680,8 +2689,8 @@
         </p:nvSpPr>
         <p:spPr>
           <a:xfrm>
-            <a:off x="6263640" y="3977640"/>
-            <a:ext cx="5349240" cy="1965960"/>
+            <a:off x="6263640" y="3886200"/>
+            <a:ext cx="5349240" cy="1280160"/>
           </a:xfrm>
           <a:prstGeom prst="rect">
             <a:avLst/>
@@ -2707,8 +2716,8 @@
         </p:nvSpPr>
         <p:spPr>
           <a:xfrm>
-            <a:off x="6263640" y="3977640"/>
-            <a:ext cx="82296" cy="1965960"/>
+            <a:off x="6263640" y="3886200"/>
+            <a:ext cx="82296" cy="1280160"/>
           </a:xfrm>
           <a:prstGeom prst="rect">
             <a:avLst/>
@@ -2727,7 +2736,7 @@
         </p:nvSpPr>
         <p:spPr>
           <a:xfrm>
-            <a:off x="6519672" y="4233672"/>
+            <a:off x="6519672" y="4242816"/>
             <a:ext cx="566928" cy="566928"/>
           </a:xfrm>
           <a:prstGeom prst="ellipse">
@@ -2755,7 +2764,7 @@
         </p:blipFill>
         <p:spPr>
           <a:xfrm>
-            <a:off x="6638544" y="4352544"/>
+            <a:off x="6638544" y="4361688"/>
             <a:ext cx="329184" cy="329184"/>
           </a:xfrm>
           <a:prstGeom prst="rect">
@@ -2771,8 +2780,8 @@
         </p:nvSpPr>
         <p:spPr>
           <a:xfrm>
-            <a:off x="7251192" y="4215384"/>
-            <a:ext cx="4206240" cy="365760"/>
+            <a:off x="7251192" y="4087368"/>
+            <a:ext cx="4160520" cy="365760"/>
           </a:xfrm>
           <a:prstGeom prst="rect">
             <a:avLst/>
@@ -2810,8 +2819,8 @@
         </p:nvSpPr>
         <p:spPr>
           <a:xfrm>
-            <a:off x="7251192" y="4581144"/>
-            <a:ext cx="4206240" cy="1234440"/>
+            <a:off x="7251192" y="4453128"/>
+            <a:ext cx="4160520" cy="530352"/>
           </a:xfrm>
           <a:prstGeom prst="rect">
             <a:avLst/>
@@ -2824,6 +2833,9 @@
           <a:lstStyle/>
           <a:p>
             <a:pPr indent="0" marL="0">
+              <a:lnSpc>
+                <a:spcPct val="102000"/>
+              </a:lnSpc>
               <a:buNone/>
             </a:pPr>
             <a:r>
@@ -3097,7 +3109,7 @@
         <p:spPr>
           <a:xfrm>
             <a:off x="8046720" y="2286000"/>
-            <a:ext cx="3383280" cy="3200400"/>
+            <a:ext cx="3383280" cy="2331720"/>
           </a:xfrm>
           <a:prstGeom prst="rect">
             <a:avLst/>
@@ -3196,6 +3208,102 @@
               <a:t>the trajectory gains a dimension that actually changes the prediction. Ceiling broken.</a:t>
             </a:r>
             <a:endParaRPr lang="en-US" sz="1400" dirty="0"/>
+          </a:p>
+        </p:txBody>
+      </p:sp>
+      <p:sp>
+        <p:nvSpPr>
+          <p:cNvPr id="10" name="Shape 7"/>
+          <p:cNvSpPr/>
+          <p:nvPr/>
+        </p:nvSpPr>
+        <p:spPr>
+          <a:xfrm>
+            <a:off x="8046720" y="4736592"/>
+            <a:ext cx="3337560" cy="749808"/>
+          </a:xfrm>
+          <a:prstGeom prst="rect">
+            <a:avLst/>
+          </a:prstGeom>
+          <a:solidFill>
+            <a:srgbClr val="EAF6F2"/>
+          </a:solidFill>
+          <a:ln/>
+        </p:spPr>
+      </p:sp>
+      <p:sp>
+        <p:nvSpPr>
+          <p:cNvPr id="11" name="Shape 8"/>
+          <p:cNvSpPr/>
+          <p:nvPr/>
+        </p:nvSpPr>
+        <p:spPr>
+          <a:xfrm>
+            <a:off x="8046720" y="4736592"/>
+            <a:ext cx="82296" cy="749808"/>
+          </a:xfrm>
+          <a:prstGeom prst="rect">
+            <a:avLst/>
+          </a:prstGeom>
+          <a:solidFill>
+            <a:srgbClr val="2A9D8F"/>
+          </a:solidFill>
+          <a:ln/>
+        </p:spPr>
+      </p:sp>
+      <p:sp>
+        <p:nvSpPr>
+          <p:cNvPr id="12" name="Text 9"/>
+          <p:cNvSpPr/>
+          <p:nvPr/>
+        </p:nvSpPr>
+        <p:spPr>
+          <a:xfrm>
+            <a:off x="8229600" y="4791456"/>
+            <a:ext cx="3108960" cy="658368"/>
+          </a:xfrm>
+          <a:prstGeom prst="rect">
+            <a:avLst/>
+          </a:prstGeom>
+          <a:noFill/>
+          <a:ln/>
+        </p:spPr>
+        <p:txBody>
+          <a:bodyPr wrap="square" lIns="0" tIns="0" rIns="0" bIns="0" rtlCol="0" anchor="ctr"/>
+          <a:lstStyle/>
+          <a:p>
+            <a:pPr indent="0" marL="0">
+              <a:buNone/>
+            </a:pPr>
+            <a:r>
+              <a:rPr lang="en-US" sz="1800" b="1" dirty="0">
+                <a:solidFill>
+                  <a:srgbClr val="2A9D8F"/>
+                </a:solidFill>
+                <a:latin typeface="Trebuchet MS" pitchFamily="34" charset="0"/>
+                <a:ea typeface="Trebuchet MS" pitchFamily="34" charset="-122"/>
+                <a:cs typeface="Trebuchet MS" pitchFamily="34" charset="-120"/>
+              </a:rPr>
+              <a:t>67.3%  →  97.7%</a:t>
+            </a:r>
+            <a:endParaRPr lang="en-US" sz="1800" dirty="0"/>
+          </a:p>
+          <a:p>
+            <a:pPr indent="0" marL="0">
+              <a:buNone/>
+            </a:pPr>
+            <a:r>
+              <a:rPr lang="en-US" sz="1050" dirty="0">
+                <a:solidFill>
+                  <a:srgbClr val="3A6157"/>
+                </a:solidFill>
+                <a:latin typeface="Trebuchet MS" pitchFamily="34" charset="0"/>
+                <a:ea typeface="Trebuchet MS" pitchFamily="34" charset="-122"/>
+                <a:cs typeface="Trebuchet MS" pitchFamily="34" charset="-120"/>
+              </a:rPr>
+              <a:t>the moment edges entered the diffusion</a:t>
+            </a:r>
+            <a:endParaRPr lang="en-US" sz="1800" dirty="0"/>
           </a:p>
         </p:txBody>
       </p:sp>
@@ -3368,8 +3476,8 @@
         </p:nvSpPr>
         <p:spPr>
           <a:xfrm>
-            <a:off x="7772400" y="1645920"/>
-            <a:ext cx="3840480" cy="731520"/>
+            <a:off x="7772400" y="1691640"/>
+            <a:ext cx="3840480" cy="676656"/>
           </a:xfrm>
           <a:prstGeom prst="rect">
             <a:avLst/>
@@ -3395,7 +3503,7 @@
         </p:nvSpPr>
         <p:spPr>
           <a:xfrm>
-            <a:off x="7909560" y="1792224"/>
+            <a:off x="7909560" y="1810512"/>
             <a:ext cx="438912" cy="438912"/>
           </a:xfrm>
           <a:prstGeom prst="ellipse">
@@ -3423,7 +3531,7 @@
         </p:blipFill>
         <p:spPr>
           <a:xfrm>
-            <a:off x="8001000" y="1883664"/>
+            <a:off x="8001000" y="1901952"/>
             <a:ext cx="256032" cy="256032"/>
           </a:xfrm>
           <a:prstGeom prst="rect">
@@ -3439,8 +3547,8 @@
         </p:nvSpPr>
         <p:spPr>
           <a:xfrm>
-            <a:off x="8458200" y="1719072"/>
-            <a:ext cx="3108960" cy="329184"/>
+            <a:off x="8458200" y="1746504"/>
+            <a:ext cx="3108960" cy="310896"/>
           </a:xfrm>
           <a:prstGeom prst="rect">
             <a:avLst/>
@@ -3478,8 +3586,8 @@
         </p:nvSpPr>
         <p:spPr>
           <a:xfrm>
-            <a:off x="8458200" y="2029968"/>
-            <a:ext cx="3108960" cy="292608"/>
+            <a:off x="8458200" y="2057400"/>
+            <a:ext cx="3108960" cy="274320"/>
           </a:xfrm>
           <a:prstGeom prst="rect">
             <a:avLst/>
@@ -3518,7 +3626,7 @@
         <p:spPr>
           <a:xfrm>
             <a:off x="7772400" y="2487168"/>
-            <a:ext cx="3840480" cy="731520"/>
+            <a:ext cx="3840480" cy="676656"/>
           </a:xfrm>
           <a:prstGeom prst="rect">
             <a:avLst/>
@@ -3544,7 +3652,7 @@
         </p:nvSpPr>
         <p:spPr>
           <a:xfrm>
-            <a:off x="7909560" y="2633472"/>
+            <a:off x="7909560" y="2606040"/>
             <a:ext cx="438912" cy="438912"/>
           </a:xfrm>
           <a:prstGeom prst="ellipse">
@@ -3572,7 +3680,7 @@
         </p:blipFill>
         <p:spPr>
           <a:xfrm>
-            <a:off x="8001000" y="2724912"/>
+            <a:off x="8001000" y="2697480"/>
             <a:ext cx="256032" cy="256032"/>
           </a:xfrm>
           <a:prstGeom prst="rect">
@@ -3588,8 +3696,8 @@
         </p:nvSpPr>
         <p:spPr>
           <a:xfrm>
-            <a:off x="8458200" y="2560320"/>
-            <a:ext cx="3108960" cy="329184"/>
+            <a:off x="8458200" y="2542032"/>
+            <a:ext cx="3108960" cy="310896"/>
           </a:xfrm>
           <a:prstGeom prst="rect">
             <a:avLst/>
@@ -3627,8 +3735,8 @@
         </p:nvSpPr>
         <p:spPr>
           <a:xfrm>
-            <a:off x="8458200" y="2871216"/>
-            <a:ext cx="3108960" cy="292608"/>
+            <a:off x="8458200" y="2852928"/>
+            <a:ext cx="3108960" cy="274320"/>
           </a:xfrm>
           <a:prstGeom prst="rect">
             <a:avLst/>
@@ -3666,8 +3774,8 @@
         </p:nvSpPr>
         <p:spPr>
           <a:xfrm>
-            <a:off x="7772400" y="3328416"/>
-            <a:ext cx="3840480" cy="731520"/>
+            <a:off x="7772400" y="3282696"/>
+            <a:ext cx="3840480" cy="676656"/>
           </a:xfrm>
           <a:prstGeom prst="rect">
             <a:avLst/>
@@ -3693,7 +3801,7 @@
         </p:nvSpPr>
         <p:spPr>
           <a:xfrm>
-            <a:off x="7909560" y="3474720"/>
+            <a:off x="7909560" y="3401568"/>
             <a:ext cx="438912" cy="438912"/>
           </a:xfrm>
           <a:prstGeom prst="ellipse">
@@ -3721,7 +3829,7 @@
         </p:blipFill>
         <p:spPr>
           <a:xfrm>
-            <a:off x="8001000" y="3566160"/>
+            <a:off x="8001000" y="3493008"/>
             <a:ext cx="256032" cy="256032"/>
           </a:xfrm>
           <a:prstGeom prst="rect">
@@ -3737,8 +3845,8 @@
         </p:nvSpPr>
         <p:spPr>
           <a:xfrm>
-            <a:off x="8458200" y="3401568"/>
-            <a:ext cx="3108960" cy="329184"/>
+            <a:off x="8458200" y="3337560"/>
+            <a:ext cx="3108960" cy="310896"/>
           </a:xfrm>
           <a:prstGeom prst="rect">
             <a:avLst/>
@@ -3776,8 +3884,8 @@
         </p:nvSpPr>
         <p:spPr>
           <a:xfrm>
-            <a:off x="8458200" y="3712464"/>
-            <a:ext cx="3108960" cy="292608"/>
+            <a:off x="8458200" y="3648456"/>
+            <a:ext cx="3108960" cy="274320"/>
           </a:xfrm>
           <a:prstGeom prst="rect">
             <a:avLst/>
@@ -3815,8 +3923,8 @@
         </p:nvSpPr>
         <p:spPr>
           <a:xfrm>
-            <a:off x="7772400" y="4169664"/>
-            <a:ext cx="3840480" cy="731520"/>
+            <a:off x="7772400" y="4078224"/>
+            <a:ext cx="3840480" cy="676656"/>
           </a:xfrm>
           <a:prstGeom prst="rect">
             <a:avLst/>
@@ -3842,7 +3950,7 @@
         </p:nvSpPr>
         <p:spPr>
           <a:xfrm>
-            <a:off x="7909560" y="4315968"/>
+            <a:off x="7909560" y="4197096"/>
             <a:ext cx="438912" cy="438912"/>
           </a:xfrm>
           <a:prstGeom prst="ellipse">
@@ -3870,7 +3978,7 @@
         </p:blipFill>
         <p:spPr>
           <a:xfrm>
-            <a:off x="8001000" y="4407408"/>
+            <a:off x="8001000" y="4288536"/>
             <a:ext cx="256032" cy="256032"/>
           </a:xfrm>
           <a:prstGeom prst="rect">
@@ -3886,8 +3994,8 @@
         </p:nvSpPr>
         <p:spPr>
           <a:xfrm>
-            <a:off x="8458200" y="4242816"/>
-            <a:ext cx="3108960" cy="329184"/>
+            <a:off x="8458200" y="4133088"/>
+            <a:ext cx="3108960" cy="310896"/>
           </a:xfrm>
           <a:prstGeom prst="rect">
             <a:avLst/>
@@ -3925,8 +4033,8 @@
         </p:nvSpPr>
         <p:spPr>
           <a:xfrm>
-            <a:off x="8458200" y="4553712"/>
-            <a:ext cx="3108960" cy="292608"/>
+            <a:off x="8458200" y="4443984"/>
+            <a:ext cx="3108960" cy="274320"/>
           </a:xfrm>
           <a:prstGeom prst="rect">
             <a:avLst/>
@@ -3964,8 +4072,8 @@
         </p:nvSpPr>
         <p:spPr>
           <a:xfrm>
-            <a:off x="7772400" y="5010912"/>
-            <a:ext cx="3840480" cy="731520"/>
+            <a:off x="7772400" y="4873752"/>
+            <a:ext cx="3840480" cy="676656"/>
           </a:xfrm>
           <a:prstGeom prst="rect">
             <a:avLst/>
@@ -3991,7 +4099,7 @@
         </p:nvSpPr>
         <p:spPr>
           <a:xfrm>
-            <a:off x="7909560" y="5157216"/>
+            <a:off x="7909560" y="4992624"/>
             <a:ext cx="438912" cy="438912"/>
           </a:xfrm>
           <a:prstGeom prst="ellipse">
@@ -4019,7 +4127,7 @@
         </p:blipFill>
         <p:spPr>
           <a:xfrm>
-            <a:off x="8001000" y="5248656"/>
+            <a:off x="8001000" y="5084064"/>
             <a:ext cx="256032" cy="256032"/>
           </a:xfrm>
           <a:prstGeom prst="rect">
@@ -4035,8 +4143,8 @@
         </p:nvSpPr>
         <p:spPr>
           <a:xfrm>
-            <a:off x="8458200" y="5084064"/>
-            <a:ext cx="3108960" cy="329184"/>
+            <a:off x="8458200" y="4928616"/>
+            <a:ext cx="3108960" cy="310896"/>
           </a:xfrm>
           <a:prstGeom prst="rect">
             <a:avLst/>
@@ -4074,8 +4182,8 @@
         </p:nvSpPr>
         <p:spPr>
           <a:xfrm>
-            <a:off x="8458200" y="5394960"/>
-            <a:ext cx="3108960" cy="292608"/>
+            <a:off x="8458200" y="5239512"/>
+            <a:ext cx="3108960" cy="274320"/>
           </a:xfrm>
           <a:prstGeom prst="rect">
             <a:avLst/>
@@ -4274,7 +4382,7 @@
         </p:nvSpPr>
         <p:spPr>
           <a:xfrm>
-            <a:off x="8229600" y="1783080"/>
+            <a:off x="8229600" y="1600200"/>
             <a:ext cx="3383280" cy="1143000"/>
           </a:xfrm>
           <a:prstGeom prst="rect">
@@ -4301,7 +4409,7 @@
         </p:nvSpPr>
         <p:spPr>
           <a:xfrm>
-            <a:off x="8430768" y="2093976"/>
+            <a:off x="8430768" y="1911096"/>
             <a:ext cx="502920" cy="502920"/>
           </a:xfrm>
           <a:prstGeom prst="ellipse">
@@ -4329,7 +4437,7 @@
         </p:blipFill>
         <p:spPr>
           <a:xfrm>
-            <a:off x="8531352" y="2194560"/>
+            <a:off x="8531352" y="2011680"/>
             <a:ext cx="301752" cy="301752"/>
           </a:xfrm>
           <a:prstGeom prst="rect">
@@ -4345,7 +4453,7 @@
         </p:nvSpPr>
         <p:spPr>
           <a:xfrm>
-            <a:off x="9098280" y="1947672"/>
+            <a:off x="9098280" y="1764792"/>
             <a:ext cx="2377440" cy="822960"/>
           </a:xfrm>
           <a:prstGeom prst="rect">
@@ -4384,7 +4492,7 @@
         </p:nvSpPr>
         <p:spPr>
           <a:xfrm>
-            <a:off x="8229600" y="3108960"/>
+            <a:off x="8229600" y="3044952"/>
             <a:ext cx="3383280" cy="1143000"/>
           </a:xfrm>
           <a:prstGeom prst="rect">
@@ -4411,7 +4519,7 @@
         </p:nvSpPr>
         <p:spPr>
           <a:xfrm>
-            <a:off x="8430768" y="3419856"/>
+            <a:off x="8430768" y="3355848"/>
             <a:ext cx="502920" cy="502920"/>
           </a:xfrm>
           <a:prstGeom prst="ellipse">
@@ -4439,7 +4547,7 @@
         </p:blipFill>
         <p:spPr>
           <a:xfrm>
-            <a:off x="8531352" y="3520440"/>
+            <a:off x="8531352" y="3456432"/>
             <a:ext cx="301752" cy="301752"/>
           </a:xfrm>
           <a:prstGeom prst="rect">
@@ -4455,7 +4563,7 @@
         </p:nvSpPr>
         <p:spPr>
           <a:xfrm>
-            <a:off x="9098280" y="3273552"/>
+            <a:off x="9098280" y="3209544"/>
             <a:ext cx="2377440" cy="822960"/>
           </a:xfrm>
           <a:prstGeom prst="rect">
@@ -4494,7 +4602,7 @@
         </p:nvSpPr>
         <p:spPr>
           <a:xfrm>
-            <a:off x="8229600" y="4434840"/>
+            <a:off x="8229600" y="4489704"/>
             <a:ext cx="3383280" cy="1143000"/>
           </a:xfrm>
           <a:prstGeom prst="rect">
@@ -4521,7 +4629,7 @@
         </p:nvSpPr>
         <p:spPr>
           <a:xfrm>
-            <a:off x="8430768" y="4745736"/>
+            <a:off x="8430768" y="4800600"/>
             <a:ext cx="502920" cy="502920"/>
           </a:xfrm>
           <a:prstGeom prst="ellipse">
@@ -4549,7 +4657,7 @@
         </p:blipFill>
         <p:spPr>
           <a:xfrm>
-            <a:off x="8531352" y="4846320"/>
+            <a:off x="8531352" y="4901184"/>
             <a:ext cx="301752" cy="301752"/>
           </a:xfrm>
           <a:prstGeom prst="rect">
@@ -4565,7 +4673,7 @@
         </p:nvSpPr>
         <p:spPr>
           <a:xfrm>
-            <a:off x="9098280" y="4599432"/>
+            <a:off x="9098280" y="4654296"/>
             <a:ext cx="2377440" cy="822960"/>
           </a:xfrm>
           <a:prstGeom prst="rect">
@@ -4765,21 +4873,41 @@
         </p:nvSpPr>
         <p:spPr>
           <a:xfrm>
-            <a:off x="8092440" y="1691640"/>
-            <a:ext cx="3520440" cy="1828800"/>
+            <a:off x="8092440" y="1554480"/>
+            <a:ext cx="3520440" cy="1993392"/>
           </a:xfrm>
           <a:prstGeom prst="rect">
             <a:avLst/>
           </a:prstGeom>
           <a:solidFill>
             <a:srgbClr val="E63946"/>
+          </a:solidFill>
+          <a:ln/>
+        </p:spPr>
+      </p:sp>
+      <p:sp>
+        <p:nvSpPr>
+          <p:cNvPr id="7" name="Shape 4"/>
+          <p:cNvSpPr/>
+          <p:nvPr/>
+        </p:nvSpPr>
+        <p:spPr>
+          <a:xfrm>
+            <a:off x="8302752" y="1783080"/>
+            <a:ext cx="512064" cy="512064"/>
+          </a:xfrm>
+          <a:prstGeom prst="ellipse">
+            <a:avLst/>
+          </a:prstGeom>
+          <a:solidFill>
+            <a:srgbClr val="FFFFFF"/>
           </a:solidFill>
           <a:ln/>
         </p:spPr>
       </p:sp>
       <p:pic>
         <p:nvPicPr>
-          <p:cNvPr id="7" name="Image 1" descr="preencoded.png">    </p:cNvPr>
+          <p:cNvPr id="8" name="Image 1" descr="preencoded.png">    </p:cNvPr>
           <p:cNvPicPr>
             <a:picLocks noChangeAspect="1"/>
           </p:cNvPicPr>
@@ -4793,8 +4921,8 @@
         </p:blipFill>
         <p:spPr>
           <a:xfrm>
-            <a:off x="8321040" y="1920240"/>
-            <a:ext cx="457200" cy="457200"/>
+            <a:off x="8385048" y="1865376"/>
+            <a:ext cx="347472" cy="347472"/>
           </a:xfrm>
           <a:prstGeom prst="rect">
             <a:avLst/>
@@ -4803,14 +4931,14 @@
       </p:pic>
       <p:sp>
         <p:nvSpPr>
-          <p:cNvPr id="8" name="Text 4"/>
-          <p:cNvSpPr/>
-          <p:nvPr/>
-        </p:nvSpPr>
-        <p:spPr>
-          <a:xfrm>
-            <a:off x="8869680" y="1938528"/>
-            <a:ext cx="2606040" cy="457200"/>
+          <p:cNvPr id="9" name="Text 5"/>
+          <p:cNvSpPr/>
+          <p:nvPr/>
+        </p:nvSpPr>
+        <p:spPr>
+          <a:xfrm>
+            <a:off x="8915400" y="1810512"/>
+            <a:ext cx="2560320" cy="457200"/>
           </a:xfrm>
           <a:prstGeom prst="rect">
             <a:avLst/>
@@ -4842,14 +4970,14 @@
       </p:sp>
       <p:sp>
         <p:nvSpPr>
-          <p:cNvPr id="9" name="Text 5"/>
-          <p:cNvSpPr/>
-          <p:nvPr/>
-        </p:nvSpPr>
-        <p:spPr>
-          <a:xfrm>
-            <a:off x="8321040" y="2468880"/>
-            <a:ext cx="3154680" cy="960120"/>
+          <p:cNvPr id="10" name="Text 6"/>
+          <p:cNvSpPr/>
+          <p:nvPr/>
+        </p:nvSpPr>
+        <p:spPr>
+          <a:xfrm>
+            <a:off x="8321040" y="2377440"/>
+            <a:ext cx="3154680" cy="1051560"/>
           </a:xfrm>
           <a:prstGeom prst="rect">
             <a:avLst/>
@@ -4881,14 +5009,14 @@
       </p:sp>
       <p:sp>
         <p:nvSpPr>
-          <p:cNvPr id="10" name="Shape 6"/>
-          <p:cNvSpPr/>
-          <p:nvPr/>
-        </p:nvSpPr>
-        <p:spPr>
-          <a:xfrm>
-            <a:off x="8092440" y="3703320"/>
-            <a:ext cx="3520440" cy="1874520"/>
+          <p:cNvPr id="11" name="Shape 7"/>
+          <p:cNvSpPr/>
+          <p:nvPr/>
+        </p:nvSpPr>
+        <p:spPr>
+          <a:xfrm>
+            <a:off x="8092440" y="3657600"/>
+            <a:ext cx="3520440" cy="1984248"/>
           </a:xfrm>
           <a:prstGeom prst="rect">
             <a:avLst/>
@@ -4901,13 +5029,13 @@
       </p:sp>
       <p:sp>
         <p:nvSpPr>
-          <p:cNvPr id="11" name="Shape 7"/>
-          <p:cNvSpPr/>
-          <p:nvPr/>
-        </p:nvSpPr>
-        <p:spPr>
-          <a:xfrm>
-            <a:off x="8275320" y="3913632"/>
+          <p:cNvPr id="12" name="Shape 8"/>
+          <p:cNvSpPr/>
+          <p:nvPr/>
+        </p:nvSpPr>
+        <p:spPr>
+          <a:xfrm>
+            <a:off x="8302752" y="3886200"/>
             <a:ext cx="512064" cy="512064"/>
           </a:xfrm>
           <a:prstGeom prst="ellipse">
@@ -4921,7 +5049,7 @@
       </p:sp>
       <p:pic>
         <p:nvPicPr>
-          <p:cNvPr id="12" name="Image 2" descr="preencoded.png">    </p:cNvPr>
+          <p:cNvPr id="13" name="Image 2" descr="preencoded.png">    </p:cNvPr>
           <p:cNvPicPr>
             <a:picLocks noChangeAspect="1"/>
           </p:cNvPicPr>
@@ -4935,7 +5063,7 @@
         </p:blipFill>
         <p:spPr>
           <a:xfrm>
-            <a:off x="8357616" y="3995928"/>
+            <a:off x="8385048" y="3968496"/>
             <a:ext cx="347472" cy="347472"/>
           </a:xfrm>
           <a:prstGeom prst="rect">
@@ -4945,14 +5073,14 @@
       </p:pic>
       <p:sp>
         <p:nvSpPr>
-          <p:cNvPr id="13" name="Text 8"/>
-          <p:cNvSpPr/>
-          <p:nvPr/>
-        </p:nvSpPr>
-        <p:spPr>
-          <a:xfrm>
-            <a:off x="8887968" y="3950208"/>
-            <a:ext cx="2606040" cy="457200"/>
+          <p:cNvPr id="14" name="Text 9"/>
+          <p:cNvSpPr/>
+          <p:nvPr/>
+        </p:nvSpPr>
+        <p:spPr>
+          <a:xfrm>
+            <a:off x="8915400" y="3913632"/>
+            <a:ext cx="2560320" cy="457200"/>
           </a:xfrm>
           <a:prstGeom prst="rect">
             <a:avLst/>
@@ -4984,14 +5112,14 @@
       </p:sp>
       <p:sp>
         <p:nvSpPr>
-          <p:cNvPr id="14" name="Text 9"/>
-          <p:cNvSpPr/>
-          <p:nvPr/>
-        </p:nvSpPr>
-        <p:spPr>
-          <a:xfrm>
-            <a:off x="8321040" y="4498848"/>
-            <a:ext cx="3154680" cy="960120"/>
+          <p:cNvPr id="15" name="Text 10"/>
+          <p:cNvSpPr/>
+          <p:nvPr/>
+        </p:nvSpPr>
+        <p:spPr>
+          <a:xfrm>
+            <a:off x="8321040" y="4480560"/>
+            <a:ext cx="3154680" cy="1051560"/>
           </a:xfrm>
           <a:prstGeom prst="rect">
             <a:avLst/>
@@ -5009,7 +5137,7 @@
             <a:r>
               <a:rPr lang="en-US" sz="1200" dirty="0">
                 <a:solidFill>
-                  <a:srgbClr val="E2F5F1"/>
+                  <a:srgbClr val="EAFBF6"/>
                 </a:solidFill>
                 <a:latin typeface="Calibri" pitchFamily="34" charset="0"/>
                 <a:ea typeface="Calibri" pitchFamily="34" charset="-122"/>
@@ -5190,8 +5318,8 @@
         </p:nvSpPr>
         <p:spPr>
           <a:xfrm>
-            <a:off x="7909560" y="1737360"/>
-            <a:ext cx="3703320" cy="3931920"/>
+            <a:off x="7909560" y="1554480"/>
+            <a:ext cx="3703320" cy="4206240"/>
           </a:xfrm>
           <a:prstGeom prst="rect">
             <a:avLst/>
@@ -5217,7 +5345,7 @@
         </p:nvSpPr>
         <p:spPr>
           <a:xfrm>
-            <a:off x="7909560" y="1737360"/>
+            <a:off x="7909560" y="1554480"/>
             <a:ext cx="3703320" cy="548640"/>
           </a:xfrm>
           <a:prstGeom prst="rect">
@@ -5237,7 +5365,7 @@
         </p:nvSpPr>
         <p:spPr>
           <a:xfrm>
-            <a:off x="8092440" y="1810512"/>
+            <a:off x="8092440" y="1627632"/>
             <a:ext cx="3383280" cy="411480"/>
           </a:xfrm>
           <a:prstGeom prst="rect">
@@ -5276,8 +5404,8 @@
         </p:nvSpPr>
         <p:spPr>
           <a:xfrm>
-            <a:off x="8092440" y="2423160"/>
-            <a:ext cx="3337560" cy="3108960"/>
+            <a:off x="8092440" y="2331720"/>
+            <a:ext cx="3337560" cy="3291840"/>
           </a:xfrm>
           <a:prstGeom prst="rect">
             <a:avLst/>
@@ -5286,17 +5414,17 @@
           <a:ln/>
         </p:spPr>
         <p:txBody>
-          <a:bodyPr wrap="square" lIns="0" tIns="0" rIns="0" bIns="0" rtlCol="0" anchor="t"/>
-          <a:lstStyle/>
-          <a:p>
-            <a:pPr indent="0" marL="0">
-              <a:lnSpc>
-                <a:spcPct val="100000"/>
-              </a:lnSpc>
-              <a:buNone/>
-            </a:pPr>
-            <a:r>
-              <a:rPr lang="en-US" sz="3000" b="1" dirty="0">
+          <a:bodyPr wrap="square" lIns="0" tIns="0" rIns="0" bIns="0" rtlCol="0" anchor="ctr"/>
+          <a:lstStyle/>
+          <a:p>
+            <a:pPr indent="0" marL="0">
+              <a:spcAft>
+                <a:spcPts val="200"/>
+              </a:spcAft>
+              <a:buNone/>
+            </a:pPr>
+            <a:r>
+              <a:rPr lang="en-US" sz="3200" b="1" dirty="0">
                 <a:solidFill>
                   <a:srgbClr val="8D99AE"/>
                 </a:solidFill>
@@ -5306,13 +5434,13 @@
               </a:rPr>
               <a:t>63%</a:t>
             </a:r>
-            <a:endParaRPr lang="en-US" sz="3000" dirty="0"/>
-          </a:p>
-          <a:p>
-            <a:pPr indent="0" marL="0">
-              <a:lnSpc>
-                <a:spcPct val="100000"/>
-              </a:lnSpc>
+            <a:endParaRPr lang="en-US" sz="3200" dirty="0"/>
+          </a:p>
+          <a:p>
+            <a:pPr indent="0" marL="0">
+              <a:spcAft>
+                <a:spcPts val="1400"/>
+              </a:spcAft>
               <a:buNone/>
             </a:pPr>
             <a:r>
@@ -5326,26 +5454,17 @@
               </a:rPr>
               <a:t>baseline-solo ASR on the hardest fold once median-pool defends</a:t>
             </a:r>
-            <a:endParaRPr lang="en-US" sz="3000" dirty="0"/>
-          </a:p>
-          <a:p>
-            <a:pPr indent="0" marL="0">
-              <a:lnSpc>
-                <a:spcPct val="100000"/>
-              </a:lnSpc>
-              <a:buNone/>
-            </a:pPr>
-            <a:endParaRPr lang="en-US" sz="3000" dirty="0"/>
-          </a:p>
-          <a:p>
-            <a:pPr indent="0" marL="0">
-              <a:lnSpc>
-                <a:spcPct val="100000"/>
-              </a:lnSpc>
-              <a:buNone/>
-            </a:pPr>
-            <a:r>
-              <a:rPr lang="en-US" sz="3000" b="1" dirty="0">
+            <a:endParaRPr lang="en-US" sz="3200" dirty="0"/>
+          </a:p>
+          <a:p>
+            <a:pPr indent="0" marL="0">
+              <a:spcAft>
+                <a:spcPts val="200"/>
+              </a:spcAft>
+              <a:buNone/>
+            </a:pPr>
+            <a:r>
+              <a:rPr lang="en-US" sz="3200" b="1" dirty="0">
                 <a:solidFill>
                   <a:srgbClr val="2A9D8F"/>
                 </a:solidFill>
@@ -5355,13 +5474,13 @@
               </a:rPr>
               <a:t>92.46%</a:t>
             </a:r>
-            <a:endParaRPr lang="en-US" sz="3000" dirty="0"/>
-          </a:p>
-          <a:p>
-            <a:pPr indent="0" marL="0">
-              <a:lnSpc>
-                <a:spcPct val="100000"/>
-              </a:lnSpc>
+            <a:endParaRPr lang="en-US" sz="3200" dirty="0"/>
+          </a:p>
+          <a:p>
+            <a:pPr indent="0" marL="0">
+              <a:spcAft>
+                <a:spcPts val="1600"/>
+              </a:spcAft>
               <a:buNone/>
             </a:pPr>
             <a:r>
@@ -5375,26 +5494,14 @@
               </a:rPr>
               <a:t>recovered by joint X+A diffusion + k_sweep</a:t>
             </a:r>
-            <a:endParaRPr lang="en-US" sz="3000" dirty="0"/>
-          </a:p>
-          <a:p>
-            <a:pPr indent="0" marL="0">
-              <a:lnSpc>
-                <a:spcPct val="100000"/>
-              </a:lnSpc>
-              <a:buNone/>
-            </a:pPr>
-            <a:endParaRPr lang="en-US" sz="3000" dirty="0"/>
-          </a:p>
-          <a:p>
-            <a:pPr indent="0" marL="0">
-              <a:lnSpc>
-                <a:spcPct val="100000"/>
-              </a:lnSpc>
-              <a:buNone/>
-            </a:pPr>
-            <a:r>
-              <a:rPr lang="en-US" sz="1200" i="1" dirty="0">
+            <a:endParaRPr lang="en-US" sz="3200" dirty="0"/>
+          </a:p>
+          <a:p>
+            <a:pPr indent="0" marL="0">
+              <a:buNone/>
+            </a:pPr>
+            <a:r>
+              <a:rPr lang="en-US" sz="1250" i="1" dirty="0">
                 <a:solidFill>
                   <a:srgbClr val="21295C"/>
                 </a:solidFill>
@@ -5404,7 +5511,7 @@
               </a:rPr>
               <a:t>The diffusion mechanism earns its keep precisely against defenses — on undefended models a simple baseline suffices.</a:t>
             </a:r>
-            <a:endParaRPr lang="en-US" sz="3000" dirty="0"/>
+            <a:endParaRPr lang="en-US" sz="3200" dirty="0"/>
           </a:p>
         </p:txBody>
       </p:sp>
@@ -5577,7 +5684,7 @@
             <a:avLst/>
           </a:prstGeom>
           <a:solidFill>
-            <a:srgbClr val="2C3666"/>
+            <a:srgbClr val="3C4789"/>
           </a:solidFill>
           <a:ln/>
         </p:spPr>
@@ -5591,7 +5698,7 @@
         <p:spPr>
           <a:xfrm>
             <a:off x="777240" y="2697480"/>
-            <a:ext cx="91440" cy="1143000"/>
+            <a:ext cx="109728" cy="1143000"/>
           </a:xfrm>
           <a:prstGeom prst="rect">
             <a:avLst/>
@@ -5610,7 +5717,7 @@
         </p:nvSpPr>
         <p:spPr>
           <a:xfrm>
-            <a:off x="1051560" y="3008376"/>
+            <a:off x="1078992" y="3008376"/>
             <a:ext cx="530352" cy="530352"/>
           </a:xfrm>
           <a:prstGeom prst="ellipse">
@@ -5638,7 +5745,7 @@
         </p:blipFill>
         <p:spPr>
           <a:xfrm>
-            <a:off x="1161288" y="3118104"/>
+            <a:off x="1188720" y="3118104"/>
             <a:ext cx="310896" cy="310896"/>
           </a:xfrm>
           <a:prstGeom prst="rect">
@@ -5654,7 +5761,7 @@
         </p:nvSpPr>
         <p:spPr>
           <a:xfrm>
-            <a:off x="1828800" y="2862072"/>
+            <a:off x="1874520" y="2862072"/>
             <a:ext cx="9326880" cy="411480"/>
           </a:xfrm>
           <a:prstGeom prst="rect">
@@ -5693,7 +5800,7 @@
         </p:nvSpPr>
         <p:spPr>
           <a:xfrm>
-            <a:off x="1828800" y="3264408"/>
+            <a:off x="1874520" y="3264408"/>
             <a:ext cx="9326880" cy="502920"/>
           </a:xfrm>
           <a:prstGeom prst="rect">
@@ -5712,7 +5819,7 @@
             <a:r>
               <a:rPr lang="en-US" sz="1250" dirty="0">
                 <a:solidFill>
-                  <a:srgbClr val="CADCFC"/>
+                  <a:srgbClr val="EAF0FF"/>
                 </a:solidFill>
                 <a:latin typeface="Calibri" pitchFamily="34" charset="0"/>
                 <a:ea typeface="Calibri" pitchFamily="34" charset="-122"/>
@@ -5739,7 +5846,7 @@
             <a:avLst/>
           </a:prstGeom>
           <a:solidFill>
-            <a:srgbClr val="2C3666"/>
+            <a:srgbClr val="3C4789"/>
           </a:solidFill>
           <a:ln/>
         </p:spPr>
@@ -5753,7 +5860,7 @@
         <p:spPr>
           <a:xfrm>
             <a:off x="777240" y="3995928"/>
-            <a:ext cx="91440" cy="1143000"/>
+            <a:ext cx="109728" cy="1143000"/>
           </a:xfrm>
           <a:prstGeom prst="rect">
             <a:avLst/>
@@ -5772,7 +5879,7 @@
         </p:nvSpPr>
         <p:spPr>
           <a:xfrm>
-            <a:off x="1051560" y="4306824"/>
+            <a:off x="1078992" y="4306824"/>
             <a:ext cx="530352" cy="530352"/>
           </a:xfrm>
           <a:prstGeom prst="ellipse">
@@ -5800,7 +5907,7 @@
         </p:blipFill>
         <p:spPr>
           <a:xfrm>
-            <a:off x="1161288" y="4416552"/>
+            <a:off x="1188720" y="4416552"/>
             <a:ext cx="310896" cy="310896"/>
           </a:xfrm>
           <a:prstGeom prst="rect">
@@ -5816,7 +5923,7 @@
         </p:nvSpPr>
         <p:spPr>
           <a:xfrm>
-            <a:off x="1828800" y="4160520"/>
+            <a:off x="1874520" y="4160520"/>
             <a:ext cx="9326880" cy="411480"/>
           </a:xfrm>
           <a:prstGeom prst="rect">
@@ -5855,7 +5962,7 @@
         </p:nvSpPr>
         <p:spPr>
           <a:xfrm>
-            <a:off x="1828800" y="4562856"/>
+            <a:off x="1874520" y="4562856"/>
             <a:ext cx="9326880" cy="502920"/>
           </a:xfrm>
           <a:prstGeom prst="rect">
@@ -5874,7 +5981,7 @@
             <a:r>
               <a:rPr lang="en-US" sz="1250" dirty="0">
                 <a:solidFill>
-                  <a:srgbClr val="CADCFC"/>
+                  <a:srgbClr val="EAF0FF"/>
                 </a:solidFill>
                 <a:latin typeface="Calibri" pitchFamily="34" charset="0"/>
                 <a:ea typeface="Calibri" pitchFamily="34" charset="-122"/>
@@ -5901,7 +6008,7 @@
             <a:avLst/>
           </a:prstGeom>
           <a:solidFill>
-            <a:srgbClr val="2C3666"/>
+            <a:srgbClr val="3C4789"/>
           </a:solidFill>
           <a:ln/>
         </p:spPr>
@@ -5915,7 +6022,7 @@
         <p:spPr>
           <a:xfrm>
             <a:off x="777240" y="5294376"/>
-            <a:ext cx="91440" cy="1143000"/>
+            <a:ext cx="109728" cy="1143000"/>
           </a:xfrm>
           <a:prstGeom prst="rect">
             <a:avLst/>
@@ -5934,7 +6041,7 @@
         </p:nvSpPr>
         <p:spPr>
           <a:xfrm>
-            <a:off x="1051560" y="5605272"/>
+            <a:off x="1078992" y="5605272"/>
             <a:ext cx="530352" cy="530352"/>
           </a:xfrm>
           <a:prstGeom prst="ellipse">
@@ -5962,7 +6069,7 @@
         </p:blipFill>
         <p:spPr>
           <a:xfrm>
-            <a:off x="1161288" y="5715000"/>
+            <a:off x="1188720" y="5715000"/>
             <a:ext cx="310896" cy="310896"/>
           </a:xfrm>
           <a:prstGeom prst="rect">
@@ -5978,7 +6085,7 @@
         </p:nvSpPr>
         <p:spPr>
           <a:xfrm>
-            <a:off x="1828800" y="5458968"/>
+            <a:off x="1874520" y="5458968"/>
             <a:ext cx="9326880" cy="411480"/>
           </a:xfrm>
           <a:prstGeom prst="rect">
@@ -6017,7 +6124,7 @@
         </p:nvSpPr>
         <p:spPr>
           <a:xfrm>
-            <a:off x="1828800" y="5861304"/>
+            <a:off x="1874520" y="5861304"/>
             <a:ext cx="9326880" cy="502920"/>
           </a:xfrm>
           <a:prstGeom prst="rect">
@@ -6036,7 +6143,7 @@
             <a:r>
               <a:rPr lang="en-US" sz="1250" dirty="0">
                 <a:solidFill>
-                  <a:srgbClr val="CADCFC"/>
+                  <a:srgbClr val="EAF0FF"/>
                 </a:solidFill>
                 <a:latin typeface="Calibri" pitchFamily="34" charset="0"/>
                 <a:ea typeface="Calibri" pitchFamily="34" charset="-122"/>
